--- a/Fall_2026/slides/CPBP8306_Session7_Dataframes_and_Tidy_Data.pptx
+++ b/Fall_2026/slides/CPBP8306_Session7_Dataframes_and_Tidy_Data.pptx
@@ -3749,7 +3749,7 @@
                 <a:ea typeface="Arial" pitchFamily="34" charset="-122"/>
                 <a:cs typeface="Arial" pitchFamily="34" charset="-120"/>
               </a:rPr>
-              <a:t>9</a:t>
+              <a:t>10</a:t>
             </a:r>
             <a:endParaRPr lang="en-US" sz="900" dirty="0"/>
           </a:p>
@@ -4327,7 +4327,7 @@
                 <a:ea typeface="Arial" pitchFamily="34" charset="-122"/>
                 <a:cs typeface="Arial" pitchFamily="34" charset="-120"/>
               </a:rPr>
-              <a:t>10</a:t>
+              <a:t>11</a:t>
             </a:r>
             <a:endParaRPr lang="en-US" sz="900" dirty="0"/>
           </a:p>
@@ -5482,74 +5482,6 @@
           </a:prstGeom>
         </p:spPr>
       </p:pic>
-      <p:sp>
-        <p:nvSpPr>
-          <p:cNvPr id="3" name="Shape 0"/>
-          <p:cNvSpPr/>
-          <p:nvPr/>
-        </p:nvSpPr>
-        <p:spPr>
-          <a:xfrm>
-            <a:off x="640080" y="457200"/>
-            <a:ext cx="1828800" cy="292608"/>
-          </a:xfrm>
-          <a:prstGeom prst="roundRect">
-            <a:avLst>
-              <a:gd name="adj" fmla="val 50000"/>
-            </a:avLst>
-          </a:prstGeom>
-          <a:solidFill>
-            <a:srgbClr val="ECB748"/>
-          </a:solidFill>
-          <a:ln/>
-        </p:spPr>
-        <p:txBody>
-          <a:bodyPr/>
-          <a:lstStyle/>
-          <a:p>
-            <a:endParaRPr lang="en-US"/>
-          </a:p>
-        </p:txBody>
-      </p:sp>
-      <p:sp>
-        <p:nvSpPr>
-          <p:cNvPr id="4" name="Text 1"/>
-          <p:cNvSpPr txBox="1"/>
-          <p:nvPr/>
-        </p:nvSpPr>
-        <p:spPr>
-          <a:xfrm>
-            <a:off x="640080" y="457200"/>
-            <a:ext cx="1828800" cy="292608"/>
-          </a:xfrm>
-          <a:prstGeom prst="rect">
-            <a:avLst/>
-          </a:prstGeom>
-          <a:noFill/>
-          <a:ln/>
-        </p:spPr>
-        <p:txBody>
-          <a:bodyPr wrap="square" rtlCol="0" anchor="ctr"/>
-          <a:lstStyle/>
-          <a:p>
-            <a:pPr marL="0" indent="0" algn="ctr">
-              <a:buNone/>
-            </a:pPr>
-            <a:r>
-              <a:rPr lang="en-US" sz="1100" b="1" kern="0" spc="100" dirty="0">
-                <a:solidFill>
-                  <a:srgbClr val="1C1C1C"/>
-                </a:solidFill>
-                <a:latin typeface="Arial" pitchFamily="34" charset="0"/>
-                <a:ea typeface="Arial" pitchFamily="34" charset="-122"/>
-                <a:cs typeface="Arial" pitchFamily="34" charset="-120"/>
-              </a:rPr>
-              <a:t>ROADMAP</a:t>
-            </a:r>
-            <a:endParaRPr lang="en-US" sz="1100" dirty="0"/>
-          </a:p>
-        </p:txBody>
-      </p:sp>
       <p:sp>
         <p:nvSpPr>
           <p:cNvPr id="5" name="Text 2"/>
@@ -10985,6 +10917,45 @@
           <a:p>
             <a:pPr algn="ctr"/>
             <a:endParaRPr lang="en-US"/>
+          </a:p>
+        </p:txBody>
+      </p:sp>
+      <p:sp>
+        <p:nvSpPr>
+          <p:cNvPr id="17" name="Text 11"/>
+          <p:cNvSpPr txBox="1"/>
+          <p:nvPr/>
+        </p:nvSpPr>
+        <p:spPr>
+          <a:xfrm>
+            <a:off x="11368735" y="6492240"/>
+            <a:ext cx="457200" cy="274320"/>
+          </a:xfrm>
+          <a:prstGeom prst="rect">
+            <a:avLst/>
+          </a:prstGeom>
+          <a:noFill/>
+          <a:ln/>
+        </p:spPr>
+        <p:txBody>
+          <a:bodyPr wrap="square" rtlCol="0" anchor="ctr"/>
+          <a:lstStyle/>
+          <a:p>
+            <a:pPr marL="0" indent="0" algn="r">
+              <a:buNone/>
+            </a:pPr>
+            <a:r>
+              <a:rPr lang="en-US" sz="900" dirty="0">
+                <a:solidFill>
+                  <a:srgbClr val="9B9690"/>
+                </a:solidFill>
+                <a:latin typeface="Arial" pitchFamily="34" charset="0"/>
+                <a:ea typeface="Arial" pitchFamily="34" charset="-122"/>
+                <a:cs typeface="Arial" pitchFamily="34" charset="-120"/>
+              </a:rPr>
+              <a:t>7</a:t>
+            </a:r>
+            <a:endParaRPr lang="en-US" sz="900" dirty="0"/>
           </a:p>
         </p:txBody>
       </p:sp>
@@ -14070,7 +14041,7 @@
                 <a:ea typeface="Arial" pitchFamily="34" charset="-122"/>
                 <a:cs typeface="Arial" pitchFamily="34" charset="-120"/>
               </a:rPr>
-              <a:t>7</a:t>
+              <a:t>8</a:t>
             </a:r>
             <a:endParaRPr lang="en-US" sz="900" dirty="0"/>
           </a:p>
@@ -15411,7 +15382,7 @@
                 <a:ea typeface="Arial" pitchFamily="34" charset="-122"/>
                 <a:cs typeface="Arial" pitchFamily="34" charset="-120"/>
               </a:rPr>
-              <a:t>8</a:t>
+              <a:t>9</a:t>
             </a:r>
             <a:endParaRPr lang="en-US" sz="900" dirty="0"/>
           </a:p>
